--- a/Презентация_Проект_БД.pptx
+++ b/Презентация_Проект_БД.pptx
@@ -6944,11 +6944,7 @@
             </a:pPr>
             <a:r>
               <a:rPr lang="ru-RU" sz="1800" dirty="0"/>
-              <a:t>Поиск необходимых инструментов, подготовка </a:t>
-            </a:r>
-            <a:r>
-              <a:rPr lang="ru-RU" sz="1800" dirty="0" err="1"/>
-              <a:t>датасета</a:t>
+              <a:t>Поиск необходимых инструментов, подготовка схемы проекта</a:t>
             </a:r>
             <a:endParaRPr sz="1800" dirty="0"/>
           </a:p>
@@ -7992,7 +7988,7 @@
           <a:p>
             <a:r>
               <a:rPr lang="ru-RU" sz="1800" dirty="0"/>
-              <a:t>Вычисление метрик, менеджер серверов и имитация потока пользователей в тестовых условиях</a:t>
+              <a:t>Получение и обработка сырых данных, вычисление метрик</a:t>
             </a:r>
           </a:p>
           <a:p>
@@ -8112,7 +8108,7 @@
           <a:p>
             <a:r>
               <a:rPr lang="ru-RU" sz="1800" dirty="0"/>
-              <a:t>Язык написания проекта</a:t>
+              <a:t>Симуляция потока пользователей для демонстрации, менеджер серверов</a:t>
             </a:r>
           </a:p>
         </p:txBody>
@@ -10241,7 +10237,7 @@
                   <a:schemeClr val="bg1"/>
                 </a:solidFill>
               </a:rPr>
-              <a:t>Приобрели </a:t>
+              <a:t>  Приобрели </a:t>
             </a:r>
             <a:endParaRPr b="1" dirty="0"/>
           </a:p>
@@ -10656,7 +10652,7 @@
                   <a:schemeClr val="bg1"/>
                 </a:solidFill>
               </a:rPr>
-              <a:t>Планируем </a:t>
+              <a:t> Планируем </a:t>
             </a:r>
             <a:endParaRPr b="1" dirty="0"/>
           </a:p>
